--- a/2026-Fall/第五周算法分析报告/算法分析报告-董轩启-202508100614-1013.pptx
+++ b/2026-Fall/第五周算法分析报告/算法分析报告-董轩启-202508100614-1013.pptx
@@ -22,6 +22,8 @@
     <p:sldId id="266" r:id="rId15"/>
     <p:sldId id="267" r:id="rId16"/>
     <p:sldId id="268" r:id="rId17"/>
+    <p:sldId id="269" r:id="rId18"/>
+    <p:sldId id="270" r:id="rId19"/>
   </p:sldIdLst>
   <p:sldSz cx="12192000" cy="6858000"/>
   <p:notesSz cx="6858000" cy="9144000"/>
@@ -1002,7 +1004,7 @@
                   <a:srgbClr val="000000"/>
                 </a:solidFill>
               </a:rPr>
-              <a:t>Hoare分区虽然在相同元素场景下表现优秀，但它有一个致命瓶颈：主元固定取最左端。当输入数组已经排好序时，主元恰好是最小值，左指针立刻停在最左边，右指针一路左移到最左边才停下，每次划分结果都是0比n-1，递归树退化成一条链。总比较次数是n加n-1一直加到1，也就是O(n平方)。这就是快速排序最坏情况的典型场景。</a:t>
+              <a:t>这一页证明Hoare分区的两个基础性质。首先是边界安全性：因为主元x等于A[p]，而i的循环条件是A[i]小于x，j的循环条件是A[j]大于x，x这个值本身一定能让两个指针停下来，所以i不会走出数组右端，j不会走出数组左端。其次是终止性：因为j至少是p，且相遇时j一定小于r，所以每次切分出来的左右两段都非空，递归不会死循环。</a:t>
             </a:r>
             <a:endParaRPr lang="en-US" sz="1400" b="0" i="0" u="none" strike="noStrike">
               <a:solidFill>
@@ -1234,7 +1236,7 @@
                   <a:srgbClr val="000000"/>
                 </a:solidFill>
               </a:rPr>
-              <a:t>解决方案非常简单：在分区函数开头，随机从当前区间选一个元素，和最左端元素交换。这样不管输入数组是不是已排序，主元位置都是随机的，已排序输入不再是触发最坏情况的毒药。期望时间复杂度回到O(n log n)，最坏情况的概率是n的阶乘分之一，实际工程中完全可以忽略。如果想更稳妥，还可以用三数取中法，选首、中、尾三个位置的中位数作为主元。</a:t>
+              <a:t>这一页证明划分性质。核心是循环不变量：i左边的元素都小于x，j右边的元素都大于x。当两个指针相遇时，相遇点左边所有元素都小于等于x，右边所有元素都大于等于x，所以左段每个元素自然小于等于右段每个元素。另外要强调Hoare和Lomuto的本质区别：Lomuto把主元放到最终正确位置，和两段分离；Hoare的主元可能被交换到任意位置，不保证就位，但两段都非空，递归依然正确。这也是为什么Hoare递归左段是[p,q]而不是[p,q-1]。</a:t>
             </a:r>
             <a:endParaRPr lang="en-US" sz="1400" b="0" i="0" u="none" strike="noStrike">
               <a:solidFill>
@@ -1317,6 +1319,470 @@
 </file>
 
 <file path=ppt/notesSlides/notesSlide12.xml><?xml version="1.0" encoding="utf-8"?>
+<p:notes xmlns:a="http://schemas.openxmlformats.org/drawingml/2006/main" xmlns:r="http://schemas.openxmlformats.org/officeDocument/2006/relationships" xmlns:p="http://schemas.openxmlformats.org/presentationml/2006/main">
+  <p:cSld>
+    <p:spTree>
+      <p:nvGrpSpPr>
+        <p:cNvPr id="1" name=""/>
+        <p:cNvGrpSpPr/>
+        <p:nvPr/>
+      </p:nvGrpSpPr>
+      <p:grpSpPr>
+        <a:xfrm>
+          <a:off x="0" y="0"/>
+          <a:ext cx="0" cy="0"/>
+          <a:chOff x="0" y="0"/>
+          <a:chExt cx="0" cy="0"/>
+        </a:xfrm>
+      </p:grpSpPr>
+      <p:sp>
+        <p:nvSpPr>
+          <p:cNvPr id="2" name="Header Placeholder 1"/>
+          <p:cNvSpPr>
+            <a:spLocks noGrp="1"/>
+          </p:cNvSpPr>
+          <p:nvPr>
+            <p:ph type="hdr" sz="quarter"/>
+          </p:nvPr>
+        </p:nvSpPr>
+        <p:spPr>
+          <a:xfrm>
+            <a:off x="0" y="0"/>
+            <a:ext cx="3962400" cy="342900"/>
+          </a:xfrm>
+          <a:prstGeom prst="rect">
+            <a:avLst/>
+          </a:prstGeom>
+        </p:spPr>
+        <p:txBody>
+          <a:bodyPr vert="horz" lIns="91440" tIns="45720" rIns="91440" bIns="45720" rtlCol="0"/>
+          <a:lstStyle>
+            <a:lvl1pPr algn="l">
+              <a:defRPr sz="1200"/>
+            </a:lvl1pPr>
+          </a:lstStyle>
+          <a:p/>
+        </p:txBody>
+      </p:sp>
+      <p:sp>
+        <p:nvSpPr>
+          <p:cNvPr id="3" name="Date Placeholder 2"/>
+          <p:cNvSpPr>
+            <a:spLocks noGrp="1"/>
+          </p:cNvSpPr>
+          <p:nvPr>
+            <p:ph type="dt" idx="1"/>
+          </p:nvPr>
+        </p:nvSpPr>
+        <p:spPr>
+          <a:xfrm>
+            <a:off x="5180013" y="0"/>
+            <a:ext cx="3962400" cy="342900"/>
+          </a:xfrm>
+          <a:prstGeom prst="rect">
+            <a:avLst/>
+          </a:prstGeom>
+        </p:spPr>
+        <p:txBody>
+          <a:bodyPr vert="horz" lIns="91440" tIns="45720" rIns="91440" bIns="45720" rtlCol="0"/>
+          <a:lstStyle>
+            <a:lvl1pPr algn="r">
+              <a:defRPr sz="1200"/>
+            </a:lvl1pPr>
+          </a:lstStyle>
+          <a:p>
+            <a:r>
+              <a:rPr lang="cs-CZ" smtClean="0"/>
+              <a:t>1.7.2013</a:t>
+            </a:r>
+            <a:endParaRPr lang="cs-CZ" smtClean="0"/>
+          </a:p>
+        </p:txBody>
+      </p:sp>
+      <p:sp>
+        <p:nvSpPr>
+          <p:cNvPr id="4" name="Slide Image Placeholder 3"/>
+          <p:cNvSpPr>
+            <a:spLocks noGrp="1" noRot="1" noChangeAspect="1"/>
+          </p:cNvSpPr>
+          <p:nvPr>
+            <p:ph type="sldImg" idx="2"/>
+          </p:nvPr>
+        </p:nvSpPr>
+        <p:spPr>
+          <a:xfrm>
+            <a:off x="2857500" y="512763"/>
+            <a:ext cx="3429000" cy="2566987"/>
+          </a:xfrm>
+          <a:prstGeom prst="rect">
+            <a:avLst/>
+          </a:prstGeom>
+          <a:noFill/>
+          <a:ln w="12700">
+            <a:solidFill>
+              <a:prstClr val="black"/>
+            </a:solidFill>
+          </a:ln>
+        </p:spPr>
+        <p:txBody>
+          <a:bodyPr vert="horz" lIns="91440" tIns="45720" rIns="91440" bIns="45720" rtlCol="0" anchor="ctr"/>
+          <a:lstStyle/>
+          <a:p/>
+        </p:txBody>
+      </p:sp>
+      <p:sp>
+        <p:nvSpPr>
+          <p:cNvPr id="5" name="Notes Placeholder 4"/>
+          <p:cNvSpPr>
+            <a:spLocks noGrp="1"/>
+          </p:cNvSpPr>
+          <p:nvPr>
+            <p:ph type="body" sz="quarter" idx="3"/>
+          </p:nvPr>
+        </p:nvSpPr>
+        <p:spPr>
+          <a:xfrm>
+            <a:off x="914400" y="3251200"/>
+            <a:ext cx="7315200" cy="3081338"/>
+          </a:xfrm>
+          <a:prstGeom prst="rect">
+            <a:avLst/>
+          </a:prstGeom>
+        </p:spPr>
+        <p:txBody>
+          <a:bodyPr vert="horz" lIns="91440" tIns="45720" rIns="91440" bIns="45720" rtlCol="0" anchor="ctr"/>
+          <a:lstStyle>
+            <a:lvl1pPr algn="l">
+              <a:defRPr sz="1400" b="0" i="0" u="none" strike="noStrike"/>
+            </a:lvl1pPr>
+          </a:lstStyle>
+          <a:p>
+            <a:pPr marL="0" indent="0" algn="l">
+              <a:lnSpc>
+                <a:spcPct val="100000"/>
+              </a:lnSpc>
+            </a:pPr>
+            <a:r>
+              <a:rPr lang="en-US" sz="1400" b="0" i="0" u="none" strike="noStrike">
+                <a:solidFill>
+                  <a:srgbClr val="000000"/>
+                </a:solidFill>
+              </a:rPr>
+              <a:t>Hoare分区虽然在相同元素场景下表现优秀，但它有一个致命瓶颈：主元固定取最左端。当输入数组已经排好序时，主元恰好是最小值，左指针立刻停在最左边，右指针一路左移到最左边才停下，每次划分结果都是0比n-1，递归树退化成一条链。总比较次数是n加n-1一直加到1，也就是O(n平方)。这就是快速排序最坏情况的典型场景。</a:t>
+            </a:r>
+            <a:endParaRPr lang="en-US" sz="1400" b="0" i="0" u="none" strike="noStrike">
+              <a:solidFill>
+                <a:srgbClr val="000000"/>
+              </a:solidFill>
+            </a:endParaRPr>
+          </a:p>
+        </p:txBody>
+      </p:sp>
+      <p:sp>
+        <p:nvSpPr>
+          <p:cNvPr id="6" name="Footer Placeholder 5"/>
+          <p:cNvSpPr>
+            <a:spLocks noGrp="1"/>
+          </p:cNvSpPr>
+          <p:nvPr>
+            <p:ph type="ftr" sz="quarter" idx="4"/>
+          </p:nvPr>
+        </p:nvSpPr>
+        <p:spPr>
+          <a:xfrm>
+            <a:off x="0" y="6502400"/>
+            <a:ext cx="3962400" cy="341313"/>
+          </a:xfrm>
+          <a:prstGeom prst="rect">
+            <a:avLst/>
+          </a:prstGeom>
+        </p:spPr>
+        <p:txBody>
+          <a:bodyPr vert="horz" lIns="91440" tIns="45720" rIns="91440" bIns="45720" rtlCol="0" anchor="b"/>
+          <a:lstStyle>
+            <a:lvl1pPr algn="l">
+              <a:defRPr sz="1200"/>
+            </a:lvl1pPr>
+          </a:lstStyle>
+          <a:p/>
+        </p:txBody>
+      </p:sp>
+      <p:sp>
+        <p:nvSpPr>
+          <p:cNvPr id="7" name="Slide Number Placeholder 6"/>
+          <p:cNvSpPr>
+            <a:spLocks noGrp="1"/>
+          </p:cNvSpPr>
+          <p:nvPr>
+            <p:ph type="sldNum" sz="quarter" idx="5"/>
+          </p:nvPr>
+        </p:nvSpPr>
+        <p:spPr>
+          <a:xfrm>
+            <a:off x="5180013" y="6502400"/>
+            <a:ext cx="3962400" cy="341313"/>
+          </a:xfrm>
+          <a:prstGeom prst="rect">
+            <a:avLst/>
+          </a:prstGeom>
+        </p:spPr>
+        <p:txBody>
+          <a:bodyPr vert="horz" lIns="91440" tIns="45720" rIns="91440" bIns="45720" rtlCol="0" anchor="b"/>
+          <a:lstStyle>
+            <a:lvl1pPr algn="r">
+              <a:defRPr sz="1200"/>
+            </a:lvl1pPr>
+          </a:lstStyle>
+          <a:p>
+            <a:r>
+              <a:rPr lang="cs-CZ" smtClean="0"/>
+              <a:t>‹#›</a:t>
+            </a:r>
+            <a:endParaRPr lang="cs-CZ" smtClean="0"/>
+          </a:p>
+        </p:txBody>
+      </p:sp>
+    </p:spTree>
+  </p:cSld>
+  <p:clrMapOvr>
+    <a:masterClrMapping/>
+  </p:clrMapOvr>
+</p:notes>
+</file>
+
+<file path=ppt/notesSlides/notesSlide13.xml><?xml version="1.0" encoding="utf-8"?>
+<p:notes xmlns:a="http://schemas.openxmlformats.org/drawingml/2006/main" xmlns:r="http://schemas.openxmlformats.org/officeDocument/2006/relationships" xmlns:p="http://schemas.openxmlformats.org/presentationml/2006/main">
+  <p:cSld>
+    <p:spTree>
+      <p:nvGrpSpPr>
+        <p:cNvPr id="1" name=""/>
+        <p:cNvGrpSpPr/>
+        <p:nvPr/>
+      </p:nvGrpSpPr>
+      <p:grpSpPr>
+        <a:xfrm>
+          <a:off x="0" y="0"/>
+          <a:ext cx="0" cy="0"/>
+          <a:chOff x="0" y="0"/>
+          <a:chExt cx="0" cy="0"/>
+        </a:xfrm>
+      </p:grpSpPr>
+      <p:sp>
+        <p:nvSpPr>
+          <p:cNvPr id="2" name="Header Placeholder 1"/>
+          <p:cNvSpPr>
+            <a:spLocks noGrp="1"/>
+          </p:cNvSpPr>
+          <p:nvPr>
+            <p:ph type="hdr" sz="quarter"/>
+          </p:nvPr>
+        </p:nvSpPr>
+        <p:spPr>
+          <a:xfrm>
+            <a:off x="0" y="0"/>
+            <a:ext cx="3962400" cy="342900"/>
+          </a:xfrm>
+          <a:prstGeom prst="rect">
+            <a:avLst/>
+          </a:prstGeom>
+        </p:spPr>
+        <p:txBody>
+          <a:bodyPr vert="horz" lIns="91440" tIns="45720" rIns="91440" bIns="45720" rtlCol="0"/>
+          <a:lstStyle>
+            <a:lvl1pPr algn="l">
+              <a:defRPr sz="1200"/>
+            </a:lvl1pPr>
+          </a:lstStyle>
+          <a:p/>
+        </p:txBody>
+      </p:sp>
+      <p:sp>
+        <p:nvSpPr>
+          <p:cNvPr id="3" name="Date Placeholder 2"/>
+          <p:cNvSpPr>
+            <a:spLocks noGrp="1"/>
+          </p:cNvSpPr>
+          <p:nvPr>
+            <p:ph type="dt" idx="1"/>
+          </p:nvPr>
+        </p:nvSpPr>
+        <p:spPr>
+          <a:xfrm>
+            <a:off x="5180013" y="0"/>
+            <a:ext cx="3962400" cy="342900"/>
+          </a:xfrm>
+          <a:prstGeom prst="rect">
+            <a:avLst/>
+          </a:prstGeom>
+        </p:spPr>
+        <p:txBody>
+          <a:bodyPr vert="horz" lIns="91440" tIns="45720" rIns="91440" bIns="45720" rtlCol="0"/>
+          <a:lstStyle>
+            <a:lvl1pPr algn="r">
+              <a:defRPr sz="1200"/>
+            </a:lvl1pPr>
+          </a:lstStyle>
+          <a:p>
+            <a:r>
+              <a:rPr lang="cs-CZ" smtClean="0"/>
+              <a:t>1.7.2013</a:t>
+            </a:r>
+            <a:endParaRPr lang="cs-CZ" smtClean="0"/>
+          </a:p>
+        </p:txBody>
+      </p:sp>
+      <p:sp>
+        <p:nvSpPr>
+          <p:cNvPr id="4" name="Slide Image Placeholder 3"/>
+          <p:cNvSpPr>
+            <a:spLocks noGrp="1" noRot="1" noChangeAspect="1"/>
+          </p:cNvSpPr>
+          <p:nvPr>
+            <p:ph type="sldImg" idx="2"/>
+          </p:nvPr>
+        </p:nvSpPr>
+        <p:spPr>
+          <a:xfrm>
+            <a:off x="2857500" y="512763"/>
+            <a:ext cx="3429000" cy="2566987"/>
+          </a:xfrm>
+          <a:prstGeom prst="rect">
+            <a:avLst/>
+          </a:prstGeom>
+          <a:noFill/>
+          <a:ln w="12700">
+            <a:solidFill>
+              <a:prstClr val="black"/>
+            </a:solidFill>
+          </a:ln>
+        </p:spPr>
+        <p:txBody>
+          <a:bodyPr vert="horz" lIns="91440" tIns="45720" rIns="91440" bIns="45720" rtlCol="0" anchor="ctr"/>
+          <a:lstStyle/>
+          <a:p/>
+        </p:txBody>
+      </p:sp>
+      <p:sp>
+        <p:nvSpPr>
+          <p:cNvPr id="5" name="Notes Placeholder 4"/>
+          <p:cNvSpPr>
+            <a:spLocks noGrp="1"/>
+          </p:cNvSpPr>
+          <p:nvPr>
+            <p:ph type="body" sz="quarter" idx="3"/>
+          </p:nvPr>
+        </p:nvSpPr>
+        <p:spPr>
+          <a:xfrm>
+            <a:off x="914400" y="3251200"/>
+            <a:ext cx="7315200" cy="3081338"/>
+          </a:xfrm>
+          <a:prstGeom prst="rect">
+            <a:avLst/>
+          </a:prstGeom>
+        </p:spPr>
+        <p:txBody>
+          <a:bodyPr vert="horz" lIns="91440" tIns="45720" rIns="91440" bIns="45720" rtlCol="0" anchor="ctr"/>
+          <a:lstStyle>
+            <a:lvl1pPr algn="l">
+              <a:defRPr sz="1400" b="0" i="0" u="none" strike="noStrike"/>
+            </a:lvl1pPr>
+          </a:lstStyle>
+          <a:p>
+            <a:pPr marL="0" indent="0" algn="l">
+              <a:lnSpc>
+                <a:spcPct val="100000"/>
+              </a:lnSpc>
+            </a:pPr>
+            <a:r>
+              <a:rPr lang="en-US" sz="1400" b="0" i="0" u="none" strike="noStrike">
+                <a:solidFill>
+                  <a:srgbClr val="000000"/>
+                </a:solidFill>
+              </a:rPr>
+              <a:t>解决方案非常简单：在分区函数开头，随机从当前区间选一个元素，和最左端元素交换。这样不管输入数组是不是已排序，主元位置都是随机的，已排序输入不再是触发最坏情况的毒药。期望时间复杂度回到O(n log n)，最坏情况的概率是n的阶乘分之一，实际工程中完全可以忽略。如果想更稳妥，还可以用三数取中法，选首、中、尾三个位置的中位数作为主元。</a:t>
+            </a:r>
+            <a:endParaRPr lang="en-US" sz="1400" b="0" i="0" u="none" strike="noStrike">
+              <a:solidFill>
+                <a:srgbClr val="000000"/>
+              </a:solidFill>
+            </a:endParaRPr>
+          </a:p>
+        </p:txBody>
+      </p:sp>
+      <p:sp>
+        <p:nvSpPr>
+          <p:cNvPr id="6" name="Footer Placeholder 5"/>
+          <p:cNvSpPr>
+            <a:spLocks noGrp="1"/>
+          </p:cNvSpPr>
+          <p:nvPr>
+            <p:ph type="ftr" sz="quarter" idx="4"/>
+          </p:nvPr>
+        </p:nvSpPr>
+        <p:spPr>
+          <a:xfrm>
+            <a:off x="0" y="6502400"/>
+            <a:ext cx="3962400" cy="341313"/>
+          </a:xfrm>
+          <a:prstGeom prst="rect">
+            <a:avLst/>
+          </a:prstGeom>
+        </p:spPr>
+        <p:txBody>
+          <a:bodyPr vert="horz" lIns="91440" tIns="45720" rIns="91440" bIns="45720" rtlCol="0" anchor="b"/>
+          <a:lstStyle>
+            <a:lvl1pPr algn="l">
+              <a:defRPr sz="1200"/>
+            </a:lvl1pPr>
+          </a:lstStyle>
+          <a:p/>
+        </p:txBody>
+      </p:sp>
+      <p:sp>
+        <p:nvSpPr>
+          <p:cNvPr id="7" name="Slide Number Placeholder 6"/>
+          <p:cNvSpPr>
+            <a:spLocks noGrp="1"/>
+          </p:cNvSpPr>
+          <p:nvPr>
+            <p:ph type="sldNum" sz="quarter" idx="5"/>
+          </p:nvPr>
+        </p:nvSpPr>
+        <p:spPr>
+          <a:xfrm>
+            <a:off x="5180013" y="6502400"/>
+            <a:ext cx="3962400" cy="341313"/>
+          </a:xfrm>
+          <a:prstGeom prst="rect">
+            <a:avLst/>
+          </a:prstGeom>
+        </p:spPr>
+        <p:txBody>
+          <a:bodyPr vert="horz" lIns="91440" tIns="45720" rIns="91440" bIns="45720" rtlCol="0" anchor="b"/>
+          <a:lstStyle>
+            <a:lvl1pPr algn="r">
+              <a:defRPr sz="1200"/>
+            </a:lvl1pPr>
+          </a:lstStyle>
+          <a:p>
+            <a:r>
+              <a:rPr lang="cs-CZ" smtClean="0"/>
+              <a:t>‹#›</a:t>
+            </a:r>
+            <a:endParaRPr lang="cs-CZ" smtClean="0"/>
+          </a:p>
+        </p:txBody>
+      </p:sp>
+    </p:spTree>
+  </p:cSld>
+  <p:clrMapOvr>
+    <a:masterClrMapping/>
+  </p:clrMapOvr>
+</p:notes>
+</file>
+
+<file path=ppt/notesSlides/notesSlide14.xml><?xml version="1.0" encoding="utf-8"?>
 <p:notes xmlns:a="http://schemas.openxmlformats.org/drawingml/2006/main" xmlns:r="http://schemas.openxmlformats.org/officeDocument/2006/relationships" xmlns:p="http://schemas.openxmlformats.org/presentationml/2006/main">
   <p:cSld>
     <p:spTree>
@@ -1531,7 +1997,7 @@
 </p:notes>
 </file>
 
-<file path=ppt/notesSlides/notesSlide13.xml><?xml version="1.0" encoding="utf-8"?>
+<file path=ppt/notesSlides/notesSlide15.xml><?xml version="1.0" encoding="utf-8"?>
 <p:notes xmlns:a="http://schemas.openxmlformats.org/drawingml/2006/main" xmlns:r="http://schemas.openxmlformats.org/officeDocument/2006/relationships" xmlns:p="http://schemas.openxmlformats.org/presentationml/2006/main">
   <p:cSld>
     <p:spTree>
@@ -14693,6 +15159,1395 @@
             <a:r>
               <a:rPr lang="en-US" sz="1200" b="1" i="0" u="none" strike="noStrike">
                 <a:solidFill>
+                  <a:srgbClr val="0070BA"/>
+                </a:solidFill>
+                <a:latin typeface="Roboto Mono"/>
+                <a:ea typeface="Roboto Mono"/>
+                <a:cs typeface="Roboto Mono"/>
+                <a:sym typeface="Roboto Mono"/>
+              </a:rPr>
+              <a:t>PART 02 · CORRECTNESS</a:t>
+            </a:r>
+            <a:endParaRPr lang="en-US" sz="1100"/>
+          </a:p>
+        </p:txBody>
+      </p:sp>
+      <p:sp>
+        <p:nvSpPr>
+          <p:cNvPr id="3" name="AutoShape 3"/>
+          <p:cNvSpPr txBox="1"/>
+          <p:nvPr/>
+        </p:nvSpPr>
+        <p:spPr>
+          <a:xfrm>
+            <a:off x="1016000" y="889000"/>
+            <a:ext cx="10160000" cy="508000"/>
+          </a:xfrm>
+          <a:prstGeom prst="rect">
+            <a:avLst/>
+          </a:prstGeom>
+          <a:noFill/>
+          <a:ln w="12700" cap="flat" cmpd="sng">
+            <a:noFill/>
+            <a:prstDash val="solid"/>
+            <a:round/>
+          </a:ln>
+        </p:spPr>
+        <p:txBody>
+          <a:bodyPr vert="horz" wrap="square" lIns="0" tIns="0" rIns="0" bIns="0" rtlCol="0" anchor="ctr" anchorCtr="0"/>
+          <a:lstStyle/>
+          <a:p>
+            <a:pPr marL="0" indent="0" algn="l">
+              <a:lnSpc>
+                <a:spcPct val="125000"/>
+              </a:lnSpc>
+              <a:defRPr/>
+            </a:pPr>
+            <a:r>
+              <a:rPr lang="en-US" sz="2600" b="1" i="0" u="none" strike="noStrike">
+                <a:solidFill>
+                  <a:srgbClr val="001C54"/>
+                </a:solidFill>
+                <a:latin typeface="Noto Sans SC" panose="020B0200000000000000" charset="-122"/>
+                <a:ea typeface="Noto Sans SC" panose="020B0200000000000000" charset="-122"/>
+                <a:cs typeface="Noto Sans SC" panose="020B0200000000000000" charset="-122"/>
+                <a:sym typeface="Noto Sans SC" panose="020B0200000000000000" charset="-122"/>
+              </a:rPr>
+              <a:t>Hoare 分区正确性证明（一）：边界与终止性</a:t>
+            </a:r>
+            <a:endParaRPr lang="en-US" sz="1100"/>
+          </a:p>
+        </p:txBody>
+      </p:sp>
+      <p:cxnSp>
+        <p:nvCxnSpPr>
+          <p:cNvPr id="4" name="Connector 4"/>
+          <p:cNvCxnSpPr/>
+          <p:nvPr/>
+        </p:nvCxnSpPr>
+        <p:spPr>
+          <a:xfrm rot="-4297">
+            <a:off x="1016004" y="1581150"/>
+            <a:ext cx="10160000" cy="12700"/>
+          </a:xfrm>
+          <a:prstGeom prst="straightConnector1">
+            <a:avLst/>
+          </a:prstGeom>
+          <a:solidFill>
+            <a:srgbClr val="DEE0E3">
+              <a:alpha val="100000"/>
+            </a:srgbClr>
+          </a:solidFill>
+          <a:ln w="12700" cap="flat" cmpd="sng">
+            <a:solidFill>
+              <a:srgbClr val="E2E8F0">
+                <a:alpha val="100000"/>
+              </a:srgbClr>
+            </a:solidFill>
+            <a:prstDash val="solid"/>
+            <a:round/>
+            <a:headEnd type="none" w="med" len="med"/>
+            <a:tailEnd type="none" w="med" len="med"/>
+          </a:ln>
+        </p:spPr>
+      </p:cxnSp>
+      <p:sp>
+        <p:nvSpPr>
+          <p:cNvPr id="5" name="AutoShape 5"/>
+          <p:cNvSpPr/>
+          <p:nvPr/>
+        </p:nvSpPr>
+        <p:spPr>
+          <a:xfrm>
+            <a:off x="1016000" y="1841500"/>
+            <a:ext cx="4826000" cy="4191000"/>
+          </a:xfrm>
+          <a:prstGeom prst="roundRect">
+            <a:avLst>
+              <a:gd name="adj" fmla="val 0"/>
+            </a:avLst>
+          </a:prstGeom>
+          <a:solidFill>
+            <a:srgbClr val="DBEAFE">
+              <a:alpha val="40000"/>
+            </a:srgbClr>
+          </a:solidFill>
+          <a:ln w="12700" cap="flat" cmpd="sng">
+            <a:solidFill>
+              <a:srgbClr val="003087">
+                <a:alpha val="100000"/>
+              </a:srgbClr>
+            </a:solidFill>
+            <a:prstDash val="solid"/>
+            <a:round/>
+          </a:ln>
+        </p:spPr>
+        <p:txBody>
+          <a:bodyPr vert="horz" wrap="square" lIns="63500" tIns="63500" rIns="63500" bIns="63500" rtlCol="0" anchor="ctr"/>
+          <a:lstStyle/>
+          <a:p>
+            <a:pPr algn="ctr">
+              <a:defRPr/>
+            </a:pPr>
+          </a:p>
+        </p:txBody>
+      </p:sp>
+      <p:sp>
+        <p:nvSpPr>
+          <p:cNvPr id="6" name="AutoShape 6"/>
+          <p:cNvSpPr txBox="1"/>
+          <p:nvPr/>
+        </p:nvSpPr>
+        <p:spPr>
+          <a:xfrm>
+            <a:off x="1270000" y="2032000"/>
+            <a:ext cx="4318000" cy="381000"/>
+          </a:xfrm>
+          <a:prstGeom prst="rect">
+            <a:avLst/>
+          </a:prstGeom>
+          <a:noFill/>
+          <a:ln w="12700" cap="flat" cmpd="sng">
+            <a:noFill/>
+            <a:prstDash val="solid"/>
+            <a:round/>
+          </a:ln>
+        </p:spPr>
+        <p:txBody>
+          <a:bodyPr vert="horz" wrap="square" lIns="0" tIns="0" rIns="0" bIns="0" rtlCol="0" anchor="ctr" anchorCtr="0"/>
+          <a:lstStyle/>
+          <a:p>
+            <a:pPr marL="0" indent="0" algn="l">
+              <a:lnSpc>
+                <a:spcPct val="125000"/>
+              </a:lnSpc>
+              <a:defRPr/>
+            </a:pPr>
+            <a:r>
+              <a:rPr lang="en-US" sz="1600" b="1" i="0" u="none" strike="noStrike">
+                <a:solidFill>
+                  <a:srgbClr val="003087"/>
+                </a:solidFill>
+                <a:latin typeface="Noto Sans SC" panose="020B0200000000000000" charset="-122"/>
+                <a:ea typeface="Noto Sans SC" panose="020B0200000000000000" charset="-122"/>
+                <a:cs typeface="Noto Sans SC" panose="020B0200000000000000" charset="-122"/>
+                <a:sym typeface="Noto Sans SC" panose="020B0200000000000000" charset="-122"/>
+              </a:rPr>
+              <a:t>(c) i, j 不会越出 A[p:r]</a:t>
+            </a:r>
+            <a:endParaRPr lang="en-US" sz="1100"/>
+          </a:p>
+        </p:txBody>
+      </p:sp>
+      <p:sp>
+        <p:nvSpPr>
+          <p:cNvPr id="7" name="AutoShape 7"/>
+          <p:cNvSpPr txBox="1"/>
+          <p:nvPr/>
+        </p:nvSpPr>
+        <p:spPr>
+          <a:xfrm>
+            <a:off x="1270000" y="2540000"/>
+            <a:ext cx="4318000" cy="3302000"/>
+          </a:xfrm>
+          <a:prstGeom prst="rect">
+            <a:avLst/>
+          </a:prstGeom>
+          <a:noFill/>
+          <a:ln w="12700" cap="flat" cmpd="sng">
+            <a:noFill/>
+            <a:prstDash val="solid"/>
+            <a:round/>
+          </a:ln>
+        </p:spPr>
+        <p:txBody>
+          <a:bodyPr vert="horz" wrap="square" lIns="0" tIns="0" rIns="0" bIns="0" rtlCol="0" anchor="ctr" anchorCtr="0"/>
+          <a:lstStyle/>
+          <a:p>
+            <a:pPr marL="0" indent="0" algn="l">
+              <a:lnSpc>
+                <a:spcPct val="142000"/>
+              </a:lnSpc>
+              <a:defRPr/>
+            </a:pPr>
+            <a:r>
+              <a:rPr lang="en-US" sz="1200" b="0" i="0" u="none" strike="noStrike">
+                <a:solidFill>
+                  <a:srgbClr val="1E293B"/>
+                </a:solidFill>
+                <a:latin typeface="Noto Sans SC" panose="020B0200000000000000" charset="-122"/>
+                <a:ea typeface="Noto Sans SC" panose="020B0200000000000000" charset="-122"/>
+                <a:cs typeface="Noto Sans SC" panose="020B0200000000000000" charset="-122"/>
+                <a:sym typeface="Noto Sans SC" panose="020B0200000000000000" charset="-122"/>
+              </a:rPr>
+              <a:t>设主元 </a:t>
+            </a:r>
+            <a:r>
+              <a:rPr lang="en-US" sz="1200" b="0" i="0" u="none" strike="noStrike">
+                <a:solidFill>
+                  <a:srgbClr val="003087"/>
+                </a:solidFill>
+                <a:latin typeface="Roboto Mono"/>
+                <a:ea typeface="Roboto Mono"/>
+                <a:cs typeface="Roboto Mono"/>
+                <a:sym typeface="Roboto Mono"/>
+              </a:rPr>
+              <a:t>x = A[p]</a:t>
+            </a:r>
+            <a:r>
+              <a:rPr lang="en-US" sz="1200" b="0" i="0" u="none" strike="noStrike">
+                <a:solidFill>
+                  <a:srgbClr val="1E293B"/>
+                </a:solidFill>
+                <a:latin typeface="Noto Sans SC" panose="020B0200000000000000" charset="-122"/>
+                <a:ea typeface="Noto Sans SC" panose="020B0200000000000000" charset="-122"/>
+                <a:cs typeface="Noto Sans SC" panose="020B0200000000000000" charset="-122"/>
+                <a:sym typeface="Noto Sans SC" panose="020B0200000000000000" charset="-122"/>
+              </a:rPr>
+              <a:t>。</a:t>
+            </a:r>
+            <a:endParaRPr lang="en-US" sz="1100"/>
+          </a:p>
+          <a:p>
+            <a:pPr marL="0" indent="0" algn="l">
+              <a:lnSpc>
+                <a:spcPct val="142000"/>
+              </a:lnSpc>
+            </a:pPr>
+          </a:p>
+          <a:p>
+            <a:pPr marL="0" indent="0" algn="l">
+              <a:lnSpc>
+                <a:spcPct val="142000"/>
+              </a:lnSpc>
+            </a:pPr>
+            <a:r>
+              <a:rPr lang="en-US" sz="1200" b="1" i="0" u="none" strike="noStrike">
+                <a:solidFill>
+                  <a:srgbClr val="1E293B"/>
+                </a:solidFill>
+                <a:latin typeface="Noto Sans SC" panose="020B0200000000000000" charset="-122"/>
+                <a:ea typeface="Noto Sans SC" panose="020B0200000000000000" charset="-122"/>
+                <a:cs typeface="Noto Sans SC" panose="020B0200000000000000" charset="-122"/>
+                <a:sym typeface="Noto Sans SC" panose="020B0200000000000000" charset="-122"/>
+              </a:rPr>
+              <a:t>i 不会走到 r 右侧：</a:t>
+            </a:r>
+            <a:endParaRPr lang="en-US" sz="1200" b="1" i="0" u="none" strike="noStrike">
+              <a:solidFill>
+                <a:srgbClr val="1E293B"/>
+              </a:solidFill>
+              <a:latin typeface="Noto Sans SC" panose="020B0200000000000000" charset="-122"/>
+              <a:ea typeface="Noto Sans SC" panose="020B0200000000000000" charset="-122"/>
+              <a:cs typeface="Noto Sans SC" panose="020B0200000000000000" charset="-122"/>
+              <a:sym typeface="Noto Sans SC" panose="020B0200000000000000" charset="-122"/>
+            </a:endParaRPr>
+          </a:p>
+          <a:p>
+            <a:pPr marL="0" indent="0" algn="l">
+              <a:lnSpc>
+                <a:spcPct val="142000"/>
+              </a:lnSpc>
+            </a:pPr>
+            <a:r>
+              <a:rPr lang="en-US" sz="1200" b="0" i="0" u="none" strike="noStrike">
+                <a:solidFill>
+                  <a:srgbClr val="1E293B"/>
+                </a:solidFill>
+                <a:latin typeface="Noto Sans SC" panose="020B0200000000000000" charset="-122"/>
+                <a:ea typeface="Noto Sans SC" panose="020B0200000000000000" charset="-122"/>
+                <a:cs typeface="Noto Sans SC" panose="020B0200000000000000" charset="-122"/>
+                <a:sym typeface="Noto Sans SC" panose="020B0200000000000000" charset="-122"/>
+              </a:rPr>
+              <a:t>do-while 条件为 </a:t>
+            </a:r>
+            <a:r>
+              <a:rPr lang="en-US" sz="1200" b="0" i="0" u="none" strike="noStrike">
+                <a:solidFill>
+                  <a:srgbClr val="1E293B"/>
+                </a:solidFill>
+                <a:latin typeface="Roboto Mono"/>
+                <a:ea typeface="Roboto Mono"/>
+                <a:cs typeface="Roboto Mono"/>
+                <a:sym typeface="Roboto Mono"/>
+              </a:rPr>
+              <a:t>A[i] &lt; x</a:t>
+            </a:r>
+            <a:r>
+              <a:rPr lang="en-US" sz="1200" b="0" i="0" u="none" strike="noStrike">
+                <a:solidFill>
+                  <a:srgbClr val="1E293B"/>
+                </a:solidFill>
+                <a:latin typeface="Noto Sans SC" panose="020B0200000000000000" charset="-122"/>
+                <a:ea typeface="Noto Sans SC" panose="020B0200000000000000" charset="-122"/>
+                <a:cs typeface="Noto Sans SC" panose="020B0200000000000000" charset="-122"/>
+                <a:sym typeface="Noto Sans SC" panose="020B0200000000000000" charset="-122"/>
+              </a:rPr>
+              <a:t>。数组中至少存在元素 A[p]=x 不满足 &lt; x，故 i 在向右扫描时必然在到达 r+1 之前遇到某个 &gt;= x 的元素而停下。</a:t>
+            </a:r>
+            <a:endParaRPr lang="en-US" sz="1200" b="0" i="0" u="none" strike="noStrike">
+              <a:solidFill>
+                <a:srgbClr val="1E293B"/>
+              </a:solidFill>
+              <a:latin typeface="Noto Sans SC" panose="020B0200000000000000" charset="-122"/>
+              <a:ea typeface="Noto Sans SC" panose="020B0200000000000000" charset="-122"/>
+              <a:cs typeface="Noto Sans SC" panose="020B0200000000000000" charset="-122"/>
+              <a:sym typeface="Noto Sans SC" panose="020B0200000000000000" charset="-122"/>
+            </a:endParaRPr>
+          </a:p>
+          <a:p>
+            <a:pPr marL="0" indent="0" algn="l">
+              <a:lnSpc>
+                <a:spcPct val="142000"/>
+              </a:lnSpc>
+            </a:pPr>
+          </a:p>
+          <a:p>
+            <a:pPr marL="0" indent="0" algn="l">
+              <a:lnSpc>
+                <a:spcPct val="142000"/>
+              </a:lnSpc>
+            </a:pPr>
+            <a:r>
+              <a:rPr lang="en-US" sz="1200" b="1" i="0" u="none" strike="noStrike">
+                <a:solidFill>
+                  <a:srgbClr val="1E293B"/>
+                </a:solidFill>
+                <a:latin typeface="Noto Sans SC" panose="020B0200000000000000" charset="-122"/>
+                <a:ea typeface="Noto Sans SC" panose="020B0200000000000000" charset="-122"/>
+                <a:cs typeface="Noto Sans SC" panose="020B0200000000000000" charset="-122"/>
+                <a:sym typeface="Noto Sans SC" panose="020B0200000000000000" charset="-122"/>
+              </a:rPr>
+              <a:t>j 不会走到 p 左侧：</a:t>
+            </a:r>
+            <a:endParaRPr lang="en-US" sz="1200" b="1" i="0" u="none" strike="noStrike">
+              <a:solidFill>
+                <a:srgbClr val="1E293B"/>
+              </a:solidFill>
+              <a:latin typeface="Noto Sans SC" panose="020B0200000000000000" charset="-122"/>
+              <a:ea typeface="Noto Sans SC" panose="020B0200000000000000" charset="-122"/>
+              <a:cs typeface="Noto Sans SC" panose="020B0200000000000000" charset="-122"/>
+              <a:sym typeface="Noto Sans SC" panose="020B0200000000000000" charset="-122"/>
+            </a:endParaRPr>
+          </a:p>
+          <a:p>
+            <a:pPr marL="0" indent="0" algn="l">
+              <a:lnSpc>
+                <a:spcPct val="142000"/>
+              </a:lnSpc>
+            </a:pPr>
+            <a:r>
+              <a:rPr lang="en-US" sz="1200" b="0" i="0" u="none" strike="noStrike">
+                <a:solidFill>
+                  <a:srgbClr val="1E293B"/>
+                </a:solidFill>
+                <a:latin typeface="Noto Sans SC" panose="020B0200000000000000" charset="-122"/>
+                <a:ea typeface="Noto Sans SC" panose="020B0200000000000000" charset="-122"/>
+                <a:cs typeface="Noto Sans SC" panose="020B0200000000000000" charset="-122"/>
+                <a:sym typeface="Noto Sans SC" panose="020B0200000000000000" charset="-122"/>
+              </a:rPr>
+              <a:t>do-while 条件为 </a:t>
+            </a:r>
+            <a:r>
+              <a:rPr lang="en-US" sz="1200" b="0" i="0" u="none" strike="noStrike">
+                <a:solidFill>
+                  <a:srgbClr val="1E293B"/>
+                </a:solidFill>
+                <a:latin typeface="Roboto Mono"/>
+                <a:ea typeface="Roboto Mono"/>
+                <a:cs typeface="Roboto Mono"/>
+                <a:sym typeface="Roboto Mono"/>
+              </a:rPr>
+              <a:t>A[j] &gt; x</a:t>
+            </a:r>
+            <a:r>
+              <a:rPr lang="en-US" sz="1200" b="0" i="0" u="none" strike="noStrike">
+                <a:solidFill>
+                  <a:srgbClr val="1E293B"/>
+                </a:solidFill>
+                <a:latin typeface="Noto Sans SC" panose="020B0200000000000000" charset="-122"/>
+                <a:ea typeface="Noto Sans SC" panose="020B0200000000000000" charset="-122"/>
+                <a:cs typeface="Noto Sans SC" panose="020B0200000000000000" charset="-122"/>
+                <a:sym typeface="Noto Sans SC" panose="020B0200000000000000" charset="-122"/>
+              </a:rPr>
+              <a:t>。同理，A[p]=x 不满足 &gt; x，j 向左扫描时必然在到达 p-1 之前遇到某个 &lt;= x 的元素而停下。</a:t>
+            </a:r>
+            <a:endParaRPr lang="en-US" sz="1200" b="0" i="0" u="none" strike="noStrike">
+              <a:solidFill>
+                <a:srgbClr val="1E293B"/>
+              </a:solidFill>
+              <a:latin typeface="Noto Sans SC" panose="020B0200000000000000" charset="-122"/>
+              <a:ea typeface="Noto Sans SC" panose="020B0200000000000000" charset="-122"/>
+              <a:cs typeface="Noto Sans SC" panose="020B0200000000000000" charset="-122"/>
+              <a:sym typeface="Noto Sans SC" panose="020B0200000000000000" charset="-122"/>
+            </a:endParaRPr>
+          </a:p>
+        </p:txBody>
+      </p:sp>
+      <p:sp>
+        <p:nvSpPr>
+          <p:cNvPr id="8" name="AutoShape 8"/>
+          <p:cNvSpPr/>
+          <p:nvPr/>
+        </p:nvSpPr>
+        <p:spPr>
+          <a:xfrm>
+            <a:off x="6350000" y="1841500"/>
+            <a:ext cx="4826000" cy="4191000"/>
+          </a:xfrm>
+          <a:prstGeom prst="roundRect">
+            <a:avLst>
+              <a:gd name="adj" fmla="val 0"/>
+            </a:avLst>
+          </a:prstGeom>
+          <a:solidFill>
+            <a:srgbClr val="DCFCE7">
+              <a:alpha val="50000"/>
+            </a:srgbClr>
+          </a:solidFill>
+          <a:ln w="12700" cap="flat" cmpd="sng">
+            <a:solidFill>
+              <a:srgbClr val="00783C">
+                <a:alpha val="100000"/>
+              </a:srgbClr>
+            </a:solidFill>
+            <a:prstDash val="solid"/>
+            <a:round/>
+          </a:ln>
+        </p:spPr>
+        <p:txBody>
+          <a:bodyPr vert="horz" wrap="square" lIns="63500" tIns="63500" rIns="63500" bIns="63500" rtlCol="0" anchor="ctr"/>
+          <a:lstStyle/>
+          <a:p>
+            <a:pPr algn="ctr">
+              <a:defRPr/>
+            </a:pPr>
+          </a:p>
+        </p:txBody>
+      </p:sp>
+      <p:sp>
+        <p:nvSpPr>
+          <p:cNvPr id="9" name="AutoShape 9"/>
+          <p:cNvSpPr txBox="1"/>
+          <p:nvPr/>
+        </p:nvSpPr>
+        <p:spPr>
+          <a:xfrm>
+            <a:off x="6604000" y="2032000"/>
+            <a:ext cx="4318000" cy="381000"/>
+          </a:xfrm>
+          <a:prstGeom prst="rect">
+            <a:avLst/>
+          </a:prstGeom>
+          <a:noFill/>
+          <a:ln w="12700" cap="flat" cmpd="sng">
+            <a:noFill/>
+            <a:prstDash val="solid"/>
+            <a:round/>
+          </a:ln>
+        </p:spPr>
+        <p:txBody>
+          <a:bodyPr vert="horz" wrap="square" lIns="0" tIns="0" rIns="0" bIns="0" rtlCol="0" anchor="ctr" anchorCtr="0"/>
+          <a:lstStyle/>
+          <a:p>
+            <a:pPr marL="0" indent="0" algn="l">
+              <a:lnSpc>
+                <a:spcPct val="125000"/>
+              </a:lnSpc>
+              <a:defRPr/>
+            </a:pPr>
+            <a:r>
+              <a:rPr lang="en-US" sz="1600" b="1" i="0" u="none" strike="noStrike">
+                <a:solidFill>
+                  <a:srgbClr val="00783C"/>
+                </a:solidFill>
+                <a:latin typeface="Noto Sans SC" panose="020B0200000000000000" charset="-122"/>
+                <a:ea typeface="Noto Sans SC" panose="020B0200000000000000" charset="-122"/>
+                <a:cs typeface="Noto Sans SC" panose="020B0200000000000000" charset="-122"/>
+                <a:sym typeface="Noto Sans SC" panose="020B0200000000000000" charset="-122"/>
+              </a:rPr>
+              <a:t>(d) 终止时 p ≤ j &lt; r</a:t>
+            </a:r>
+            <a:endParaRPr lang="en-US" sz="1100"/>
+          </a:p>
+        </p:txBody>
+      </p:sp>
+      <p:sp>
+        <p:nvSpPr>
+          <p:cNvPr id="10" name="AutoShape 10"/>
+          <p:cNvSpPr txBox="1"/>
+          <p:nvPr/>
+        </p:nvSpPr>
+        <p:spPr>
+          <a:xfrm>
+            <a:off x="6604000" y="2540000"/>
+            <a:ext cx="4318000" cy="3302000"/>
+          </a:xfrm>
+          <a:prstGeom prst="rect">
+            <a:avLst/>
+          </a:prstGeom>
+          <a:noFill/>
+          <a:ln w="12700" cap="flat" cmpd="sng">
+            <a:noFill/>
+            <a:prstDash val="solid"/>
+            <a:round/>
+          </a:ln>
+        </p:spPr>
+        <p:txBody>
+          <a:bodyPr vert="horz" wrap="square" lIns="0" tIns="0" rIns="0" bIns="0" rtlCol="0" anchor="ctr" anchorCtr="0"/>
+          <a:lstStyle/>
+          <a:p>
+            <a:pPr marL="0" indent="0" algn="l">
+              <a:lnSpc>
+                <a:spcPct val="142000"/>
+              </a:lnSpc>
+              <a:defRPr/>
+            </a:pPr>
+            <a:r>
+              <a:rPr lang="en-US" sz="1200" b="1" i="0" u="none" strike="noStrike">
+                <a:solidFill>
+                  <a:srgbClr val="1E293B"/>
+                </a:solidFill>
+                <a:latin typeface="Noto Sans SC" panose="020B0200000000000000" charset="-122"/>
+                <a:ea typeface="Noto Sans SC" panose="020B0200000000000000" charset="-122"/>
+                <a:cs typeface="Noto Sans SC" panose="020B0200000000000000" charset="-122"/>
+                <a:sym typeface="Noto Sans SC" panose="020B0200000000000000" charset="-122"/>
+              </a:rPr>
+              <a:t>j &gt;= p：</a:t>
+            </a:r>
+            <a:endParaRPr lang="en-US" sz="1100"/>
+          </a:p>
+          <a:p>
+            <a:pPr marL="0" indent="0" algn="l">
+              <a:lnSpc>
+                <a:spcPct val="142000"/>
+              </a:lnSpc>
+            </a:pPr>
+            <a:r>
+              <a:rPr lang="en-US" sz="1200" b="0" i="0" u="none" strike="noStrike">
+                <a:solidFill>
+                  <a:srgbClr val="1E293B"/>
+                </a:solidFill>
+                <a:latin typeface="Noto Sans SC" panose="020B0200000000000000" charset="-122"/>
+                <a:ea typeface="Noto Sans SC" panose="020B0200000000000000" charset="-122"/>
+                <a:cs typeface="Noto Sans SC" panose="020B0200000000000000" charset="-122"/>
+                <a:sym typeface="Noto Sans SC" panose="020B0200000000000000" charset="-122"/>
+              </a:rPr>
+              <a:t>由 (c)，j 不会走到 p-1，故 j ≥ p。</a:t>
+            </a:r>
+            <a:endParaRPr lang="en-US" sz="1200" b="0" i="0" u="none" strike="noStrike">
+              <a:solidFill>
+                <a:srgbClr val="1E293B"/>
+              </a:solidFill>
+              <a:latin typeface="Noto Sans SC" panose="020B0200000000000000" charset="-122"/>
+              <a:ea typeface="Noto Sans SC" panose="020B0200000000000000" charset="-122"/>
+              <a:cs typeface="Noto Sans SC" panose="020B0200000000000000" charset="-122"/>
+              <a:sym typeface="Noto Sans SC" panose="020B0200000000000000" charset="-122"/>
+            </a:endParaRPr>
+          </a:p>
+          <a:p>
+            <a:pPr marL="0" indent="0" algn="l">
+              <a:lnSpc>
+                <a:spcPct val="142000"/>
+              </a:lnSpc>
+            </a:pPr>
+          </a:p>
+          <a:p>
+            <a:pPr marL="0" indent="0" algn="l">
+              <a:lnSpc>
+                <a:spcPct val="142000"/>
+              </a:lnSpc>
+            </a:pPr>
+            <a:r>
+              <a:rPr lang="en-US" sz="1200" b="1" i="0" u="none" strike="noStrike">
+                <a:solidFill>
+                  <a:srgbClr val="1E293B"/>
+                </a:solidFill>
+                <a:latin typeface="Noto Sans SC" panose="020B0200000000000000" charset="-122"/>
+                <a:ea typeface="Noto Sans SC" panose="020B0200000000000000" charset="-122"/>
+                <a:cs typeface="Noto Sans SC" panose="020B0200000000000000" charset="-122"/>
+                <a:sym typeface="Noto Sans SC" panose="020B0200000000000000" charset="-122"/>
+              </a:rPr>
+              <a:t>j &lt; r：</a:t>
+            </a:r>
+            <a:endParaRPr lang="en-US" sz="1200" b="1" i="0" u="none" strike="noStrike">
+              <a:solidFill>
+                <a:srgbClr val="1E293B"/>
+              </a:solidFill>
+              <a:latin typeface="Noto Sans SC" panose="020B0200000000000000" charset="-122"/>
+              <a:ea typeface="Noto Sans SC" panose="020B0200000000000000" charset="-122"/>
+              <a:cs typeface="Noto Sans SC" panose="020B0200000000000000" charset="-122"/>
+              <a:sym typeface="Noto Sans SC" panose="020B0200000000000000" charset="-122"/>
+            </a:endParaRPr>
+          </a:p>
+          <a:p>
+            <a:pPr marL="0" indent="0" algn="l">
+              <a:lnSpc>
+                <a:spcPct val="142000"/>
+              </a:lnSpc>
+            </a:pPr>
+            <a:r>
+              <a:rPr lang="en-US" sz="1200" b="0" i="0" u="none" strike="noStrike">
+                <a:solidFill>
+                  <a:srgbClr val="1E293B"/>
+                </a:solidFill>
+                <a:latin typeface="Noto Sans SC" panose="020B0200000000000000" charset="-122"/>
+                <a:ea typeface="Noto Sans SC" panose="020B0200000000000000" charset="-122"/>
+                <a:cs typeface="Noto Sans SC" panose="020B0200000000000000" charset="-122"/>
+                <a:sym typeface="Noto Sans SC" panose="020B0200000000000000" charset="-122"/>
+              </a:rPr>
+              <a:t>首次 do i++ 后 i=p（因 A[p]=x 不满足 &lt; x）。循环终止条件为 i ≥ j。若 j=r，则 i ≥ r，但 i 从 p 出发、且 p &lt; r（数组至少2元素），i 不可能在第一次就 ≥ r。终止时 i 已向右移动过，故相遇点 j &lt; r。</a:t>
+            </a:r>
+            <a:endParaRPr lang="en-US" sz="1200" b="0" i="0" u="none" strike="noStrike">
+              <a:solidFill>
+                <a:srgbClr val="1E293B"/>
+              </a:solidFill>
+              <a:latin typeface="Noto Sans SC" panose="020B0200000000000000" charset="-122"/>
+              <a:ea typeface="Noto Sans SC" panose="020B0200000000000000" charset="-122"/>
+              <a:cs typeface="Noto Sans SC" panose="020B0200000000000000" charset="-122"/>
+              <a:sym typeface="Noto Sans SC" panose="020B0200000000000000" charset="-122"/>
+            </a:endParaRPr>
+          </a:p>
+          <a:p>
+            <a:pPr marL="0" indent="0" algn="l">
+              <a:lnSpc>
+                <a:spcPct val="142000"/>
+              </a:lnSpc>
+            </a:pPr>
+          </a:p>
+          <a:p>
+            <a:pPr marL="0" indent="0" algn="l">
+              <a:lnSpc>
+                <a:spcPct val="142000"/>
+              </a:lnSpc>
+            </a:pPr>
+            <a:r>
+              <a:rPr lang="en-US" sz="1200" b="1" i="0" u="none" strike="noStrike">
+                <a:solidFill>
+                  <a:srgbClr val="1E293B"/>
+                </a:solidFill>
+                <a:latin typeface="Noto Sans SC" panose="020B0200000000000000" charset="-122"/>
+                <a:ea typeface="Noto Sans SC" panose="020B0200000000000000" charset="-122"/>
+                <a:cs typeface="Noto Sans SC" panose="020B0200000000000000" charset="-122"/>
+                <a:sym typeface="Noto Sans SC" panose="020B0200000000000000" charset="-122"/>
+              </a:rPr>
+              <a:t>结论：</a:t>
+            </a:r>
+            <a:r>
+              <a:rPr lang="en-US" sz="1200" b="0" i="0" u="none" strike="noStrike">
+                <a:solidFill>
+                  <a:srgbClr val="1E293B"/>
+                </a:solidFill>
+                <a:latin typeface="Noto Sans SC" panose="020B0200000000000000" charset="-122"/>
+                <a:ea typeface="Noto Sans SC" panose="020B0200000000000000" charset="-122"/>
+                <a:cs typeface="Noto Sans SC" panose="020B0200000000000000" charset="-122"/>
+                <a:sym typeface="Noto Sans SC" panose="020B0200000000000000" charset="-122"/>
+              </a:rPr>
+              <a:t>每次递归切出的两段 </a:t>
+            </a:r>
+            <a:r>
+              <a:rPr lang="en-US" sz="1200" b="0" i="0" u="none" strike="noStrike">
+                <a:solidFill>
+                  <a:srgbClr val="1E293B"/>
+                </a:solidFill>
+                <a:latin typeface="Roboto Mono"/>
+                <a:ea typeface="Roboto Mono"/>
+                <a:cs typeface="Roboto Mono"/>
+                <a:sym typeface="Roboto Mono"/>
+              </a:rPr>
+              <a:t>[p..j]</a:t>
+            </a:r>
+            <a:r>
+              <a:rPr lang="en-US" sz="1200" b="0" i="0" u="none" strike="noStrike">
+                <a:solidFill>
+                  <a:srgbClr val="1E293B"/>
+                </a:solidFill>
+                <a:latin typeface="Noto Sans SC" panose="020B0200000000000000" charset="-122"/>
+                <a:ea typeface="Noto Sans SC" panose="020B0200000000000000" charset="-122"/>
+                <a:cs typeface="Noto Sans SC" panose="020B0200000000000000" charset="-122"/>
+                <a:sym typeface="Noto Sans SC" panose="020B0200000000000000" charset="-122"/>
+              </a:rPr>
+              <a:t> 和 </a:t>
+            </a:r>
+            <a:r>
+              <a:rPr lang="en-US" sz="1200" b="0" i="0" u="none" strike="noStrike">
+                <a:solidFill>
+                  <a:srgbClr val="1E293B"/>
+                </a:solidFill>
+                <a:latin typeface="Roboto Mono"/>
+                <a:ea typeface="Roboto Mono"/>
+                <a:cs typeface="Roboto Mono"/>
+                <a:sym typeface="Roboto Mono"/>
+              </a:rPr>
+              <a:t>[j+1..r]</a:t>
+            </a:r>
+            <a:r>
+              <a:rPr lang="en-US" sz="1200" b="0" i="0" u="none" strike="noStrike">
+                <a:solidFill>
+                  <a:srgbClr val="1E293B"/>
+                </a:solidFill>
+                <a:latin typeface="Noto Sans SC" panose="020B0200000000000000" charset="-122"/>
+                <a:ea typeface="Noto Sans SC" panose="020B0200000000000000" charset="-122"/>
+                <a:cs typeface="Noto Sans SC" panose="020B0200000000000000" charset="-122"/>
+                <a:sym typeface="Noto Sans SC" panose="020B0200000000000000" charset="-122"/>
+              </a:rPr>
+              <a:t> 均非空。</a:t>
+            </a:r>
+            <a:endParaRPr lang="en-US" sz="1200" b="0" i="0" u="none" strike="noStrike">
+              <a:solidFill>
+                <a:srgbClr val="1E293B"/>
+              </a:solidFill>
+              <a:latin typeface="Noto Sans SC" panose="020B0200000000000000" charset="-122"/>
+              <a:ea typeface="Noto Sans SC" panose="020B0200000000000000" charset="-122"/>
+              <a:cs typeface="Noto Sans SC" panose="020B0200000000000000" charset="-122"/>
+              <a:sym typeface="Noto Sans SC" panose="020B0200000000000000" charset="-122"/>
+            </a:endParaRPr>
+          </a:p>
+        </p:txBody>
+      </p:sp>
+    </p:spTree>
+  </p:cSld>
+  <p:clrMapOvr>
+    <a:masterClrMapping/>
+  </p:clrMapOvr>
+</p:sld>
+</file>
+
+<file path=ppt/slides/slide11.xml><?xml version="1.0" encoding="utf-8"?>
+<p:sld xmlns:a="http://schemas.openxmlformats.org/drawingml/2006/main" xmlns:r="http://schemas.openxmlformats.org/officeDocument/2006/relationships" xmlns:p="http://schemas.openxmlformats.org/presentationml/2006/main">
+  <p:cSld>
+    <p:bg>
+      <p:bgPr>
+        <a:solidFill>
+          <a:srgbClr val="FFFFFF">
+            <a:alpha val="100000"/>
+          </a:srgbClr>
+        </a:solidFill>
+        <a:effectLst/>
+      </p:bgPr>
+    </p:bg>
+    <p:spTree>
+      <p:nvGrpSpPr>
+        <p:cNvPr id="1" name=""/>
+        <p:cNvGrpSpPr/>
+        <p:nvPr/>
+      </p:nvGrpSpPr>
+      <p:grpSpPr>
+        <a:xfrm>
+          <a:off x="0" y="0"/>
+          <a:ext cx="0" cy="0"/>
+          <a:chOff x="0" y="0"/>
+          <a:chExt cx="0" cy="0"/>
+        </a:xfrm>
+      </p:grpSpPr>
+      <p:sp>
+        <p:nvSpPr>
+          <p:cNvPr id="2" name="AutoShape 2"/>
+          <p:cNvSpPr txBox="1"/>
+          <p:nvPr/>
+        </p:nvSpPr>
+        <p:spPr>
+          <a:xfrm>
+            <a:off x="1016000" y="508000"/>
+            <a:ext cx="2540000" cy="304800"/>
+          </a:xfrm>
+          <a:prstGeom prst="rect">
+            <a:avLst/>
+          </a:prstGeom>
+          <a:noFill/>
+          <a:ln w="12700" cap="flat" cmpd="sng">
+            <a:noFill/>
+            <a:prstDash val="solid"/>
+            <a:round/>
+          </a:ln>
+        </p:spPr>
+        <p:txBody>
+          <a:bodyPr vert="horz" wrap="square" lIns="0" tIns="0" rIns="0" bIns="0" rtlCol="0" anchor="ctr" anchorCtr="0"/>
+          <a:lstStyle/>
+          <a:p>
+            <a:pPr marL="0" indent="0" algn="l">
+              <a:lnSpc>
+                <a:spcPct val="125000"/>
+              </a:lnSpc>
+              <a:defRPr/>
+            </a:pPr>
+            <a:r>
+              <a:rPr lang="en-US" sz="1200" b="1" i="0" u="none" strike="noStrike">
+                <a:solidFill>
+                  <a:srgbClr val="0070BA"/>
+                </a:solidFill>
+                <a:latin typeface="Roboto Mono"/>
+                <a:ea typeface="Roboto Mono"/>
+                <a:cs typeface="Roboto Mono"/>
+                <a:sym typeface="Roboto Mono"/>
+              </a:rPr>
+              <a:t>PART 02 · CORRECTNESS</a:t>
+            </a:r>
+            <a:endParaRPr lang="en-US" sz="1100"/>
+          </a:p>
+        </p:txBody>
+      </p:sp>
+      <p:sp>
+        <p:nvSpPr>
+          <p:cNvPr id="3" name="AutoShape 3"/>
+          <p:cNvSpPr txBox="1"/>
+          <p:nvPr/>
+        </p:nvSpPr>
+        <p:spPr>
+          <a:xfrm>
+            <a:off x="1016000" y="889000"/>
+            <a:ext cx="10160000" cy="508000"/>
+          </a:xfrm>
+          <a:prstGeom prst="rect">
+            <a:avLst/>
+          </a:prstGeom>
+          <a:noFill/>
+          <a:ln w="12700" cap="flat" cmpd="sng">
+            <a:noFill/>
+            <a:prstDash val="solid"/>
+            <a:round/>
+          </a:ln>
+        </p:spPr>
+        <p:txBody>
+          <a:bodyPr vert="horz" wrap="square" lIns="0" tIns="0" rIns="0" bIns="0" rtlCol="0" anchor="ctr" anchorCtr="0"/>
+          <a:lstStyle/>
+          <a:p>
+            <a:pPr marL="0" indent="0" algn="l">
+              <a:lnSpc>
+                <a:spcPct val="125000"/>
+              </a:lnSpc>
+              <a:defRPr/>
+            </a:pPr>
+            <a:r>
+              <a:rPr lang="en-US" sz="2600" b="1" i="0" u="none" strike="noStrike">
+                <a:solidFill>
+                  <a:srgbClr val="001C54"/>
+                </a:solidFill>
+                <a:latin typeface="Noto Sans SC" panose="020B0200000000000000" charset="-122"/>
+                <a:ea typeface="Noto Sans SC" panose="020B0200000000000000" charset="-122"/>
+                <a:cs typeface="Noto Sans SC" panose="020B0200000000000000" charset="-122"/>
+                <a:sym typeface="Noto Sans SC" panose="020B0200000000000000" charset="-122"/>
+              </a:rPr>
+              <a:t>Hoare 分区正确性证明（二）：划分性质</a:t>
+            </a:r>
+            <a:endParaRPr lang="en-US" sz="1100"/>
+          </a:p>
+        </p:txBody>
+      </p:sp>
+      <p:cxnSp>
+        <p:nvCxnSpPr>
+          <p:cNvPr id="4" name="Connector 4"/>
+          <p:cNvCxnSpPr/>
+          <p:nvPr/>
+        </p:nvCxnSpPr>
+        <p:spPr>
+          <a:xfrm rot="-4297">
+            <a:off x="1016004" y="1581150"/>
+            <a:ext cx="10160000" cy="12700"/>
+          </a:xfrm>
+          <a:prstGeom prst="straightConnector1">
+            <a:avLst/>
+          </a:prstGeom>
+          <a:solidFill>
+            <a:srgbClr val="DEE0E3">
+              <a:alpha val="100000"/>
+            </a:srgbClr>
+          </a:solidFill>
+          <a:ln w="12700" cap="flat" cmpd="sng">
+            <a:solidFill>
+              <a:srgbClr val="E2E8F0">
+                <a:alpha val="100000"/>
+              </a:srgbClr>
+            </a:solidFill>
+            <a:prstDash val="solid"/>
+            <a:round/>
+            <a:headEnd type="none" w="med" len="med"/>
+            <a:tailEnd type="none" w="med" len="med"/>
+          </a:ln>
+        </p:spPr>
+      </p:cxnSp>
+      <p:sp>
+        <p:nvSpPr>
+          <p:cNvPr id="5" name="AutoShape 5"/>
+          <p:cNvSpPr/>
+          <p:nvPr/>
+        </p:nvSpPr>
+        <p:spPr>
+          <a:xfrm>
+            <a:off x="1016000" y="1841500"/>
+            <a:ext cx="10160000" cy="2540000"/>
+          </a:xfrm>
+          <a:prstGeom prst="roundRect">
+            <a:avLst>
+              <a:gd name="adj" fmla="val 0"/>
+            </a:avLst>
+          </a:prstGeom>
+          <a:solidFill>
+            <a:srgbClr val="DBEAFE">
+              <a:alpha val="40000"/>
+            </a:srgbClr>
+          </a:solidFill>
+          <a:ln w="12700" cap="flat" cmpd="sng">
+            <a:solidFill>
+              <a:srgbClr val="003087">
+                <a:alpha val="100000"/>
+              </a:srgbClr>
+            </a:solidFill>
+            <a:prstDash val="solid"/>
+            <a:round/>
+          </a:ln>
+        </p:spPr>
+        <p:txBody>
+          <a:bodyPr vert="horz" wrap="square" lIns="63500" tIns="63500" rIns="63500" bIns="63500" rtlCol="0" anchor="ctr"/>
+          <a:lstStyle/>
+          <a:p>
+            <a:pPr algn="ctr">
+              <a:defRPr/>
+            </a:pPr>
+          </a:p>
+        </p:txBody>
+      </p:sp>
+      <p:sp>
+        <p:nvSpPr>
+          <p:cNvPr id="6" name="AutoShape 6"/>
+          <p:cNvSpPr txBox="1"/>
+          <p:nvPr/>
+        </p:nvSpPr>
+        <p:spPr>
+          <a:xfrm>
+            <a:off x="1270000" y="2032000"/>
+            <a:ext cx="9652000" cy="381000"/>
+          </a:xfrm>
+          <a:prstGeom prst="rect">
+            <a:avLst/>
+          </a:prstGeom>
+          <a:noFill/>
+          <a:ln w="12700" cap="flat" cmpd="sng">
+            <a:noFill/>
+            <a:prstDash val="solid"/>
+            <a:round/>
+          </a:ln>
+        </p:spPr>
+        <p:txBody>
+          <a:bodyPr vert="horz" wrap="square" lIns="0" tIns="0" rIns="0" bIns="0" rtlCol="0" anchor="ctr" anchorCtr="0"/>
+          <a:lstStyle/>
+          <a:p>
+            <a:pPr marL="0" indent="0" algn="l">
+              <a:lnSpc>
+                <a:spcPct val="125000"/>
+              </a:lnSpc>
+              <a:defRPr/>
+            </a:pPr>
+            <a:r>
+              <a:rPr lang="en-US" sz="1600" b="1" i="0" u="none" strike="noStrike">
+                <a:solidFill>
+                  <a:srgbClr val="003087"/>
+                </a:solidFill>
+                <a:latin typeface="Noto Sans SC" panose="020B0200000000000000" charset="-122"/>
+                <a:ea typeface="Noto Sans SC" panose="020B0200000000000000" charset="-122"/>
+                <a:cs typeface="Noto Sans SC" panose="020B0200000000000000" charset="-122"/>
+                <a:sym typeface="Noto Sans SC" panose="020B0200000000000000" charset="-122"/>
+              </a:rPr>
+              <a:t>(e) 终止时 A[p:j] 每个元素 ≤ A[j+1:r] 每个元素</a:t>
+            </a:r>
+            <a:endParaRPr lang="en-US" sz="1100"/>
+          </a:p>
+        </p:txBody>
+      </p:sp>
+      <p:sp>
+        <p:nvSpPr>
+          <p:cNvPr id="7" name="AutoShape 7"/>
+          <p:cNvSpPr txBox="1"/>
+          <p:nvPr/>
+        </p:nvSpPr>
+        <p:spPr>
+          <a:xfrm>
+            <a:off x="1270000" y="2540000"/>
+            <a:ext cx="9652000" cy="1714500"/>
+          </a:xfrm>
+          <a:prstGeom prst="rect">
+            <a:avLst/>
+          </a:prstGeom>
+          <a:noFill/>
+          <a:ln w="12700" cap="flat" cmpd="sng">
+            <a:noFill/>
+            <a:prstDash val="solid"/>
+            <a:round/>
+          </a:ln>
+        </p:spPr>
+        <p:txBody>
+          <a:bodyPr vert="horz" wrap="square" lIns="0" tIns="0" rIns="0" bIns="0" rtlCol="0" anchor="ctr" anchorCtr="0"/>
+          <a:lstStyle/>
+          <a:p>
+            <a:pPr marL="0" indent="0" algn="l">
+              <a:lnSpc>
+                <a:spcPct val="142000"/>
+              </a:lnSpc>
+              <a:defRPr/>
+            </a:pPr>
+            <a:r>
+              <a:rPr lang="en-US" sz="1200" b="1" i="0" u="none" strike="noStrike">
+                <a:solidFill>
+                  <a:srgbClr val="1E293B"/>
+                </a:solidFill>
+                <a:latin typeface="Noto Sans SC" panose="020B0200000000000000" charset="-122"/>
+                <a:ea typeface="Noto Sans SC" panose="020B0200000000000000" charset="-122"/>
+                <a:cs typeface="Noto Sans SC" panose="020B0200000000000000" charset="-122"/>
+                <a:sym typeface="Noto Sans SC" panose="020B0200000000000000" charset="-122"/>
+              </a:rPr>
+              <a:t>循环不变量：</a:t>
+            </a:r>
+            <a:r>
+              <a:rPr lang="en-US" sz="1200" b="0" i="0" u="none" strike="noStrike">
+                <a:solidFill>
+                  <a:srgbClr val="1E293B"/>
+                </a:solidFill>
+                <a:latin typeface="Noto Sans SC" panose="020B0200000000000000" charset="-122"/>
+                <a:ea typeface="Noto Sans SC" panose="020B0200000000000000" charset="-122"/>
+                <a:cs typeface="Noto Sans SC" panose="020B0200000000000000" charset="-122"/>
+                <a:sym typeface="Noto Sans SC" panose="020B0200000000000000" charset="-122"/>
+              </a:rPr>
+              <a:t>在每次交换前，i 左侧所有元素都 &lt; x，j 右侧所有元素都 &gt; x。</a:t>
+            </a:r>
+            <a:endParaRPr lang="en-US" sz="1100"/>
+          </a:p>
+          <a:p>
+            <a:pPr marL="0" indent="0" algn="l">
+              <a:lnSpc>
+                <a:spcPct val="142000"/>
+              </a:lnSpc>
+            </a:pPr>
+          </a:p>
+          <a:p>
+            <a:pPr marL="0" indent="0" algn="l">
+              <a:lnSpc>
+                <a:spcPct val="142000"/>
+              </a:lnSpc>
+            </a:pPr>
+            <a:r>
+              <a:rPr lang="en-US" sz="1200" b="0" i="0" u="none" strike="noStrike">
+                <a:solidFill>
+                  <a:srgbClr val="1E293B"/>
+                </a:solidFill>
+                <a:latin typeface="Noto Sans SC" panose="020B0200000000000000" charset="-122"/>
+                <a:ea typeface="Noto Sans SC" panose="020B0200000000000000" charset="-122"/>
+                <a:cs typeface="Noto Sans SC" panose="020B0200000000000000" charset="-122"/>
+                <a:sym typeface="Noto Sans SC" panose="020B0200000000000000" charset="-122"/>
+              </a:rPr>
+              <a:t>i 停在第一个 </a:t>
+            </a:r>
+            <a:r>
+              <a:rPr lang="en-US" sz="1200" b="0" i="0" u="none" strike="noStrike">
+                <a:solidFill>
+                  <a:srgbClr val="1E293B"/>
+                </a:solidFill>
+                <a:latin typeface="Roboto Mono"/>
+                <a:ea typeface="Roboto Mono"/>
+                <a:cs typeface="Roboto Mono"/>
+                <a:sym typeface="Roboto Mono"/>
+              </a:rPr>
+              <a:t>A[i] ≥ x</a:t>
+            </a:r>
+            <a:r>
+              <a:rPr lang="en-US" sz="1200" b="0" i="0" u="none" strike="noStrike">
+                <a:solidFill>
+                  <a:srgbClr val="1E293B"/>
+                </a:solidFill>
+                <a:latin typeface="Noto Sans SC" panose="020B0200000000000000" charset="-122"/>
+                <a:ea typeface="Noto Sans SC" panose="020B0200000000000000" charset="-122"/>
+                <a:cs typeface="Noto Sans SC" panose="020B0200000000000000" charset="-122"/>
+                <a:sym typeface="Noto Sans SC" panose="020B0200000000000000" charset="-122"/>
+              </a:rPr>
+              <a:t> 的位置（do-while 在 A[i] &lt; x 时继续）；j 停在第一个 </a:t>
+            </a:r>
+            <a:r>
+              <a:rPr lang="en-US" sz="1200" b="0" i="0" u="none" strike="noStrike">
+                <a:solidFill>
+                  <a:srgbClr val="1E293B"/>
+                </a:solidFill>
+                <a:latin typeface="Roboto Mono"/>
+                <a:ea typeface="Roboto Mono"/>
+                <a:cs typeface="Roboto Mono"/>
+                <a:sym typeface="Roboto Mono"/>
+              </a:rPr>
+              <a:t>A[j] ≤ x</a:t>
+            </a:r>
+            <a:r>
+              <a:rPr lang="en-US" sz="1200" b="0" i="0" u="none" strike="noStrike">
+                <a:solidFill>
+                  <a:srgbClr val="1E293B"/>
+                </a:solidFill>
+                <a:latin typeface="Noto Sans SC" panose="020B0200000000000000" charset="-122"/>
+                <a:ea typeface="Noto Sans SC" panose="020B0200000000000000" charset="-122"/>
+                <a:cs typeface="Noto Sans SC" panose="020B0200000000000000" charset="-122"/>
+                <a:sym typeface="Noto Sans SC" panose="020B0200000000000000" charset="-122"/>
+              </a:rPr>
+              <a:t> 的位置（do-while 在 A[j] &gt; x 时继续）。</a:t>
+            </a:r>
+            <a:endParaRPr lang="en-US" sz="1200" b="0" i="0" u="none" strike="noStrike">
+              <a:solidFill>
+                <a:srgbClr val="1E293B"/>
+              </a:solidFill>
+              <a:latin typeface="Noto Sans SC" panose="020B0200000000000000" charset="-122"/>
+              <a:ea typeface="Noto Sans SC" panose="020B0200000000000000" charset="-122"/>
+              <a:cs typeface="Noto Sans SC" panose="020B0200000000000000" charset="-122"/>
+              <a:sym typeface="Noto Sans SC" panose="020B0200000000000000" charset="-122"/>
+            </a:endParaRPr>
+          </a:p>
+          <a:p>
+            <a:pPr marL="0" indent="0" algn="l">
+              <a:lnSpc>
+                <a:spcPct val="142000"/>
+              </a:lnSpc>
+            </a:pPr>
+            <a:r>
+              <a:rPr lang="en-US" sz="1200" b="0" i="0" u="none" strike="noStrike">
+                <a:solidFill>
+                  <a:srgbClr val="1E293B"/>
+                </a:solidFill>
+                <a:latin typeface="Noto Sans SC" panose="020B0200000000000000" charset="-122"/>
+                <a:ea typeface="Noto Sans SC" panose="020B0200000000000000" charset="-122"/>
+                <a:cs typeface="Noto Sans SC" panose="020B0200000000000000" charset="-122"/>
+                <a:sym typeface="Noto Sans SC" panose="020B0200000000000000" charset="-122"/>
+              </a:rPr>
+              <a:t>终止时 i ≥ j，即指针相遇。此时：</a:t>
+            </a:r>
+            <a:r>
+              <a:rPr lang="en-US" sz="1200" b="1" i="0" u="none" strike="noStrike">
+                <a:solidFill>
+                  <a:srgbClr val="1E293B"/>
+                </a:solidFill>
+                <a:latin typeface="Noto Sans SC" panose="020B0200000000000000" charset="-122"/>
+                <a:ea typeface="Noto Sans SC" panose="020B0200000000000000" charset="-122"/>
+                <a:cs typeface="Noto Sans SC" panose="020B0200000000000000" charset="-122"/>
+                <a:sym typeface="Noto Sans SC" panose="020B0200000000000000" charset="-122"/>
+              </a:rPr>
+              <a:t>[p..j] 中所有元素 ≤ x，[j+1..r] 中所有元素 ≥ x。</a:t>
+            </a:r>
+            <a:endParaRPr lang="en-US" sz="1200" b="1" i="0" u="none" strike="noStrike">
+              <a:solidFill>
+                <a:srgbClr val="1E293B"/>
+              </a:solidFill>
+              <a:latin typeface="Noto Sans SC" panose="020B0200000000000000" charset="-122"/>
+              <a:ea typeface="Noto Sans SC" panose="020B0200000000000000" charset="-122"/>
+              <a:cs typeface="Noto Sans SC" panose="020B0200000000000000" charset="-122"/>
+              <a:sym typeface="Noto Sans SC" panose="020B0200000000000000" charset="-122"/>
+            </a:endParaRPr>
+          </a:p>
+          <a:p>
+            <a:pPr marL="0" indent="0" algn="l">
+              <a:lnSpc>
+                <a:spcPct val="142000"/>
+              </a:lnSpc>
+            </a:pPr>
+            <a:r>
+              <a:rPr lang="en-US" sz="1200" b="0" i="0" u="none" strike="noStrike">
+                <a:solidFill>
+                  <a:srgbClr val="1E293B"/>
+                </a:solidFill>
+                <a:latin typeface="Noto Sans SC" panose="020B0200000000000000" charset="-122"/>
+                <a:ea typeface="Noto Sans SC" panose="020B0200000000000000" charset="-122"/>
+                <a:cs typeface="Noto Sans SC" panose="020B0200000000000000" charset="-122"/>
+                <a:sym typeface="Noto Sans SC" panose="020B0200000000000000" charset="-122"/>
+              </a:rPr>
+              <a:t>因此左段任一元素 ≤ x ≤ 右段任一元素，即 A[p:j] ≤ A[j+1:r]。</a:t>
+            </a:r>
+            <a:endParaRPr lang="en-US" sz="1200" b="0" i="0" u="none" strike="noStrike">
+              <a:solidFill>
+                <a:srgbClr val="1E293B"/>
+              </a:solidFill>
+              <a:latin typeface="Noto Sans SC" panose="020B0200000000000000" charset="-122"/>
+              <a:ea typeface="Noto Sans SC" panose="020B0200000000000000" charset="-122"/>
+              <a:cs typeface="Noto Sans SC" panose="020B0200000000000000" charset="-122"/>
+              <a:sym typeface="Noto Sans SC" panose="020B0200000000000000" charset="-122"/>
+            </a:endParaRPr>
+          </a:p>
+        </p:txBody>
+      </p:sp>
+      <p:sp>
+        <p:nvSpPr>
+          <p:cNvPr id="8" name="AutoShape 8"/>
+          <p:cNvSpPr txBox="1"/>
+          <p:nvPr/>
+        </p:nvSpPr>
+        <p:spPr>
+          <a:xfrm>
+            <a:off x="1016000" y="5080000"/>
+            <a:ext cx="10160000" cy="1270000"/>
+          </a:xfrm>
+          <a:prstGeom prst="rect">
+            <a:avLst/>
+          </a:prstGeom>
+          <a:noFill/>
+          <a:ln w="12700" cap="flat" cmpd="sng">
+            <a:noFill/>
+            <a:prstDash val="solid"/>
+            <a:round/>
+          </a:ln>
+        </p:spPr>
+        <p:txBody>
+          <a:bodyPr vert="horz" wrap="square" lIns="0" tIns="0" rIns="0" bIns="0" rtlCol="0" anchor="ctr" anchorCtr="0"/>
+          <a:lstStyle/>
+          <a:p>
+            <a:pPr marL="0" indent="0" algn="l">
+              <a:lnSpc>
+                <a:spcPct val="142000"/>
+              </a:lnSpc>
+              <a:defRPr/>
+            </a:pPr>
+            <a:endParaRPr lang="en-US" sz="1100"/>
+          </a:p>
+          <a:p>
+            <a:pPr marL="0" indent="0" algn="l">
+              <a:lnSpc>
+                <a:spcPct val="142000"/>
+              </a:lnSpc>
+            </a:pPr>
+            <a:r>
+              <a:rPr lang="en-US" sz="1300" b="0" i="0" u="none" strike="noStrike">
+                <a:solidFill>
+                  <a:srgbClr val="475569"/>
+                </a:solidFill>
+                <a:latin typeface="Noto Sans SC" panose="020B0200000000000000" charset="-122"/>
+                <a:ea typeface="Noto Sans SC" panose="020B0200000000000000" charset="-122"/>
+                <a:cs typeface="Noto Sans SC" panose="020B0200000000000000" charset="-122"/>
+                <a:sym typeface="Noto Sans SC" panose="020B0200000000000000" charset="-122"/>
+              </a:rPr>
+              <a:t>Hoare 中枢值（原 A[p]）可能被交换到 [p..j] 或 [j+1..r] 中的任意位置，</a:t>
+            </a:r>
+            <a:r>
+              <a:rPr lang="en-US" sz="1300" b="1" i="0" u="none" strike="noStrike">
+                <a:solidFill>
+                  <a:srgbClr val="475569"/>
+                </a:solidFill>
+                <a:latin typeface="Noto Sans SC" panose="020B0200000000000000" charset="-122"/>
+                <a:ea typeface="Noto Sans SC" panose="020B0200000000000000" charset="-122"/>
+                <a:cs typeface="Noto Sans SC" panose="020B0200000000000000" charset="-122"/>
+                <a:sym typeface="Noto Sans SC" panose="020B0200000000000000" charset="-122"/>
+              </a:rPr>
+              <a:t>不保证就位</a:t>
+            </a:r>
+            <a:r>
+              <a:rPr lang="en-US" sz="1300" b="0" i="0" u="none" strike="noStrike">
+                <a:solidFill>
+                  <a:srgbClr val="475569"/>
+                </a:solidFill>
+                <a:latin typeface="Noto Sans SC" panose="020B0200000000000000" charset="-122"/>
+                <a:ea typeface="Noto Sans SC" panose="020B0200000000000000" charset="-122"/>
+                <a:cs typeface="Noto Sans SC" panose="020B0200000000000000" charset="-122"/>
+                <a:sym typeface="Noto Sans SC" panose="020B0200000000000000" charset="-122"/>
+              </a:rPr>
+              <a:t>。</a:t>
+            </a:r>
+            <a:endParaRPr lang="en-US" sz="1300" b="0" i="0" u="none" strike="noStrike">
+              <a:solidFill>
+                <a:srgbClr val="475569"/>
+              </a:solidFill>
+              <a:latin typeface="Noto Sans SC" panose="020B0200000000000000" charset="-122"/>
+              <a:ea typeface="Noto Sans SC" panose="020B0200000000000000" charset="-122"/>
+              <a:cs typeface="Noto Sans SC" panose="020B0200000000000000" charset="-122"/>
+              <a:sym typeface="Noto Sans SC" panose="020B0200000000000000" charset="-122"/>
+            </a:endParaRPr>
+          </a:p>
+          <a:p>
+            <a:pPr marL="0" indent="0" algn="l">
+              <a:lnSpc>
+                <a:spcPct val="142000"/>
+              </a:lnSpc>
+            </a:pPr>
+            <a:r>
+              <a:rPr lang="en-US" sz="1300" b="0" i="0" u="none" strike="noStrike">
+                <a:solidFill>
+                  <a:srgbClr val="475569"/>
+                </a:solidFill>
+                <a:latin typeface="Noto Sans SC" panose="020B0200000000000000" charset="-122"/>
+                <a:ea typeface="Noto Sans SC" panose="020B0200000000000000" charset="-122"/>
+                <a:cs typeface="Noto Sans SC" panose="020B0200000000000000" charset="-122"/>
+                <a:sym typeface="Noto Sans SC" panose="020B0200000000000000" charset="-122"/>
+              </a:rPr>
+              <a:t>但因 p ≤ j &lt; r，两段均非空，递归仍能正确收敛——这就是递归边界写 [p..q] 与 [q+1..r] 的原因。</a:t>
+            </a:r>
+            <a:endParaRPr lang="en-US" sz="1300" b="0" i="0" u="none" strike="noStrike">
+              <a:solidFill>
+                <a:srgbClr val="475569"/>
+              </a:solidFill>
+              <a:latin typeface="Noto Sans SC" panose="020B0200000000000000" charset="-122"/>
+              <a:ea typeface="Noto Sans SC" panose="020B0200000000000000" charset="-122"/>
+              <a:cs typeface="Noto Sans SC" panose="020B0200000000000000" charset="-122"/>
+              <a:sym typeface="Noto Sans SC" panose="020B0200000000000000" charset="-122"/>
+            </a:endParaRPr>
+          </a:p>
+        </p:txBody>
+      </p:sp>
+    </p:spTree>
+  </p:cSld>
+  <p:clrMapOvr>
+    <a:masterClrMapping/>
+  </p:clrMapOvr>
+</p:sld>
+</file>
+
+<file path=ppt/slides/slide12.xml><?xml version="1.0" encoding="utf-8"?>
+<p:sld xmlns:a="http://schemas.openxmlformats.org/drawingml/2006/main" xmlns:r="http://schemas.openxmlformats.org/officeDocument/2006/relationships" xmlns:p="http://schemas.openxmlformats.org/presentationml/2006/main">
+  <p:cSld>
+    <p:bg>
+      <p:bgPr>
+        <a:solidFill>
+          <a:srgbClr val="FFFFFF">
+            <a:alpha val="100000"/>
+          </a:srgbClr>
+        </a:solidFill>
+        <a:effectLst/>
+      </p:bgPr>
+    </p:bg>
+    <p:spTree>
+      <p:nvGrpSpPr>
+        <p:cNvPr id="1" name=""/>
+        <p:cNvGrpSpPr/>
+        <p:nvPr/>
+      </p:nvGrpSpPr>
+      <p:grpSpPr>
+        <a:xfrm>
+          <a:off x="0" y="0"/>
+          <a:ext cx="0" cy="0"/>
+          <a:chOff x="0" y="0"/>
+          <a:chExt cx="0" cy="0"/>
+        </a:xfrm>
+      </p:grpSpPr>
+      <p:sp>
+        <p:nvSpPr>
+          <p:cNvPr id="2" name="AutoShape 2"/>
+          <p:cNvSpPr txBox="1"/>
+          <p:nvPr/>
+        </p:nvSpPr>
+        <p:spPr>
+          <a:xfrm>
+            <a:off x="1016000" y="508000"/>
+            <a:ext cx="2540000" cy="304800"/>
+          </a:xfrm>
+          <a:prstGeom prst="rect">
+            <a:avLst/>
+          </a:prstGeom>
+          <a:noFill/>
+          <a:ln w="12700" cap="flat" cmpd="sng">
+            <a:noFill/>
+            <a:prstDash val="solid"/>
+            <a:round/>
+          </a:ln>
+        </p:spPr>
+        <p:txBody>
+          <a:bodyPr vert="horz" wrap="square" lIns="0" tIns="0" rIns="0" bIns="0" rtlCol="0" anchor="ctr" anchorCtr="0"/>
+          <a:lstStyle/>
+          <a:p>
+            <a:pPr marL="0" indent="0" algn="l">
+              <a:lnSpc>
+                <a:spcPct val="125000"/>
+              </a:lnSpc>
+              <a:defRPr/>
+            </a:pPr>
+            <a:r>
+              <a:rPr lang="en-US" sz="1200" b="1" i="0" u="none" strike="noStrike">
+                <a:solidFill>
                   <a:srgbClr val="C0392B"/>
                 </a:solidFill>
                 <a:latin typeface="Roboto Mono"/>
@@ -15667,7 +17522,7 @@
 </p:sld>
 </file>
 
-<file path=ppt/slides/slide11.xml><?xml version="1.0" encoding="utf-8"?>
+<file path=ppt/slides/slide13.xml><?xml version="1.0" encoding="utf-8"?>
 <p:sld xmlns:a="http://schemas.openxmlformats.org/drawingml/2006/main" xmlns:r="http://schemas.openxmlformats.org/officeDocument/2006/relationships" xmlns:p="http://schemas.openxmlformats.org/presentationml/2006/main">
   <p:cSld>
     <p:bg>
@@ -16855,7 +18710,7 @@
 </p:sld>
 </file>
 
-<file path=ppt/slides/slide12.xml><?xml version="1.0" encoding="utf-8"?>
+<file path=ppt/slides/slide14.xml><?xml version="1.0" encoding="utf-8"?>
 <p:sld xmlns:a="http://schemas.openxmlformats.org/drawingml/2006/main" xmlns:r="http://schemas.openxmlformats.org/officeDocument/2006/relationships" xmlns:p="http://schemas.openxmlformats.org/presentationml/2006/main">
   <p:cSld>
     <p:spTree>
@@ -18203,42 +20058,54 @@
       </p:sp>
       <p:sp>
         <p:nvSpPr>
-          <p:cNvPr id="6" name="文本框 5"/>
+          <p:cNvPr id="4" name="AutoShape 4"/>
           <p:cNvSpPr txBox="1"/>
           <p:nvPr/>
         </p:nvSpPr>
         <p:spPr>
           <a:xfrm>
-            <a:off x="6228715" y="4559300"/>
-            <a:ext cx="4064000" cy="306705"/>
+            <a:off x="6271096" y="4729162"/>
+            <a:ext cx="2082800" cy="609600"/>
           </a:xfrm>
           <a:prstGeom prst="rect">
             <a:avLst/>
           </a:prstGeom>
           <a:noFill/>
+          <a:ln w="12700">
+            <a:noFill/>
+            <a:prstDash val="solid"/>
+          </a:ln>
         </p:spPr>
         <p:txBody>
-          <a:bodyPr wrap="square" rtlCol="0">
-            <a:spAutoFit/>
-          </a:bodyPr>
+          <a:bodyPr wrap="none" lIns="0" tIns="0" rIns="0" bIns="0" rtlCol="0" anchor="t"/>
+          <a:lstStyle/>
           <a:p>
-            <a:r>
-              <a:rPr lang="zh-CN" altLang="en-US"/>
-              <a:t>完整的</a:t>
-            </a:r>
-            <a:r>
-              <a:rPr lang="en-US" altLang="zh-CN"/>
-              <a:t>hoare</a:t>
-            </a:r>
-            <a:r>
-              <a:rPr lang="zh-CN" altLang="en-US">
-                <a:ea typeface="宋体" panose="02010600030101010101" pitchFamily="2" charset="-122"/>
-              </a:rPr>
-              <a:t>代码及测试样例</a:t>
-            </a:r>
-            <a:endParaRPr lang="zh-CN" altLang="en-US">
-              <a:ea typeface="宋体" panose="02010600030101010101" pitchFamily="2" charset="-122"/>
-            </a:endParaRPr>
+            <a:pPr marL="0" indent="0" algn="l">
+              <a:lnSpc>
+                <a:spcPct val="125000"/>
+              </a:lnSpc>
+              <a:defRPr/>
+            </a:pPr>
+            <a:r>
+              <a:rPr lang="en-US" sz="1600" b="0" i="0" u="none" strike="noStrike">
+                <a:solidFill>
+                  <a:srgbClr val="1F2329"/>
+                </a:solidFill>
+                <a:latin typeface="Noto Sans SC" panose="020B0200000000000000" charset="-122"/>
+                <a:ea typeface="Noto Sans SC" panose="020B0200000000000000" charset="-122"/>
+                <a:cs typeface="Noto Sans SC" panose="020B0200000000000000" charset="-122"/>
+                <a:sym typeface="Noto Sans SC" panose="020B0200000000000000" charset="-122"/>
+              </a:rPr>
+              <a:t>f,hoare排序的快排代码</a:t>
+            </a:r>
+            <a:endParaRPr lang="en-US" sz="1100"/>
+          </a:p>
+          <a:p>
+            <a:pPr algn="l">
+              <a:lnSpc>
+                <a:spcPct val="125000"/>
+              </a:lnSpc>
+            </a:pPr>
           </a:p>
         </p:txBody>
       </p:sp>
@@ -18250,7 +20117,7 @@
 </p:sld>
 </file>
 
-<file path=ppt/slides/slide13.xml><?xml version="1.0" encoding="utf-8"?>
+<file path=ppt/slides/slide15.xml><?xml version="1.0" encoding="utf-8"?>
 <p:sld xmlns:a="http://schemas.openxmlformats.org/drawingml/2006/main" xmlns:r="http://schemas.openxmlformats.org/officeDocument/2006/relationships" xmlns:p="http://schemas.openxmlformats.org/presentationml/2006/main">
   <p:cSld>
     <p:spTree>
@@ -19676,47 +21543,6 @@
               <a:t>}</a:t>
             </a:r>
             <a:endParaRPr lang="en-US" sz="1100"/>
-          </a:p>
-        </p:txBody>
-      </p:sp>
-      <p:sp>
-        <p:nvSpPr>
-          <p:cNvPr id="4" name="文本框 3"/>
-          <p:cNvSpPr txBox="1"/>
-          <p:nvPr/>
-        </p:nvSpPr>
-        <p:spPr>
-          <a:xfrm>
-            <a:off x="5577205" y="5650230"/>
-            <a:ext cx="4064000" cy="306705"/>
-          </a:xfrm>
-          <a:prstGeom prst="rect">
-            <a:avLst/>
-          </a:prstGeom>
-          <a:noFill/>
-        </p:spPr>
-        <p:txBody>
-          <a:bodyPr wrap="square" rtlCol="0">
-            <a:spAutoFit/>
-          </a:bodyPr>
-          <a:p>
-            <a:r>
-              <a:rPr lang="zh-CN" altLang="en-US"/>
-              <a:t>完整的随机主元后的</a:t>
-            </a:r>
-            <a:r>
-              <a:rPr lang="en-US" altLang="zh-CN"/>
-              <a:t>hoare</a:t>
-            </a:r>
-            <a:r>
-              <a:rPr lang="zh-CN" altLang="en-US">
-                <a:ea typeface="宋体" panose="02010600030101010101" pitchFamily="2" charset="-122"/>
-              </a:rPr>
-              <a:t>代码</a:t>
-            </a:r>
-            <a:endParaRPr lang="zh-CN" altLang="en-US">
-              <a:ea typeface="宋体" panose="02010600030101010101" pitchFamily="2" charset="-122"/>
-            </a:endParaRPr>
           </a:p>
         </p:txBody>
       </p:sp>
@@ -29328,7 +31154,7 @@
                 <a:cs typeface="Noto Sans SC" panose="020B0200000000000000" charset="-122"/>
                 <a:sym typeface="Noto Sans SC" panose="020B0200000000000000" charset="-122"/>
               </a:rPr>
-              <a:t>全相同元素下，两种分区的行为差异</a:t>
+              <a:t>b.全相同元素下，两种分区的行为差异</a:t>
             </a:r>
             <a:endParaRPr lang="en-US" sz="1100"/>
           </a:p>
